--- a/docs/content/two_way_anova/two_way_anova_activity.pptx
+++ b/docs/content/two_way_anova/two_way_anova_activity.pptx
@@ -17,6 +17,7 @@
     <p:sldId id="265" r:id="rId11"/>
     <p:sldId id="266" r:id="rId12"/>
     <p:sldId id="267" r:id="rId13"/>
+    <p:sldId id="268" r:id="rId14"/>
   </p:sldIdLst>
   <p:sldSz cx="9144000" cy="5143500" type="screen16x9"/>
   <p:notesSz cx="6858000" cy="9144000"/>
@@ -3668,6 +3669,530 @@
 </file>
 
 <file path=ppt/slides/slide12.xml><?xml version="1.0" encoding="utf-8"?>
+<p:sld xmlns:a="http://schemas.openxmlformats.org/drawingml/2006/main" xmlns:r="http://schemas.openxmlformats.org/officeDocument/2006/relationships" xmlns:p="http://schemas.openxmlformats.org/presentationml/2006/main">
+  <p:cSld>
+    <p:spTree>
+      <p:nvGrpSpPr>
+        <p:cNvPr id="1" name=""/>
+        <p:cNvGrpSpPr/>
+        <p:nvPr/>
+      </p:nvGrpSpPr>
+      <p:grpSpPr>
+        <a:xfrm>
+          <a:off x="0" y="0"/>
+          <a:ext cx="0" cy="0"/>
+          <a:chOff x="0" y="0"/>
+          <a:chExt cx="0" cy="0"/>
+        </a:xfrm>
+      </p:grpSpPr>
+      <p:sp>
+        <p:nvSpPr>
+          <p:cNvPr id="2" name="Title 1"/>
+          <p:cNvSpPr>
+            <a:spLocks noGrp="1"/>
+          </p:cNvSpPr>
+          <p:nvPr>
+            <p:ph type="title"/>
+          </p:nvPr>
+        </p:nvSpPr>
+        <p:spPr>
+          <a:xfrm>
+            <a:off x="0" y="0"/>
+            <a:ext cx="9144000" cy="582780"/>
+          </a:xfrm>
+        </p:spPr>
+        <p:txBody>
+          <a:bodyPr/>
+          <a:lstStyle/>
+          <a:p>
+            <a:pPr lvl="0" indent="0" marL="0">
+              <a:buNone/>
+            </a:pPr>
+            <a:r>
+              <a:rPr/>
+              <a:t>Part 9 · Take-Home Extension — Crayfish Growth by Range and Lake</a:t>
+            </a:r>
+          </a:p>
+        </p:txBody>
+      </p:sp>
+      <p:sp>
+        <p:nvSpPr>
+          <p:cNvPr id="3" name="Content Placeholder 2"/>
+          <p:cNvSpPr>
+            <a:spLocks noGrp="1"/>
+          </p:cNvSpPr>
+          <p:nvPr>
+            <p:ph idx="1"/>
+          </p:nvPr>
+        </p:nvSpPr>
+        <p:spPr/>
+        <p:txBody>
+          <a:bodyPr/>
+          <a:lstStyle/>
+          <a:p>
+            <a:pPr lvl="0" indent="0" marL="0">
+              <a:buNone/>
+            </a:pPr>
+            <a:r>
+              <a:rPr i="1"/>
+              <a:t>Due Monday, November 2 — before the following class.</a:t>
+            </a:r>
+          </a:p>
+          <a:p>
+            <a:pPr lvl="0" indent="0" marL="0">
+              <a:buNone/>
+            </a:pPr>
+            <a:r>
+              <a:rPr/>
+              <a:t>Same workflow as Parts 1–7 — fit the factorial model, check assumptions, get EMMs, compare SS types — new dataset, new question. This time you decide which SS type to trust and why; nobody walks you through it step by step.</a:t>
+            </a:r>
+          </a:p>
+          <a:p>
+            <a:pPr lvl="0" indent="0" marL="0">
+              <a:spcBef>
+                <a:spcPts val="3000"/>
+              </a:spcBef>
+              <a:buNone/>
+            </a:pPr>
+            <a:r>
+              <a:rPr b="1"/>
+              <a:t>Background</a:t>
+            </a:r>
+          </a:p>
+          <a:p>
+            <a:pPr lvl="0" indent="0" marL="0">
+              <a:buNone/>
+            </a:pPr>
+            <a:r>
+              <a:rPr/>
+              <a:t>Sargent &amp; Lodge (2014) reared young-of-year rusty crayfish (</a:t>
+            </a:r>
+            <a:r>
+              <a:rPr i="1"/>
+              <a:t>Orconectes rusticus</a:t>
+            </a:r>
+            <a:r>
+              <a:rPr/>
+              <a:t>) from both native (Ohio) and invasive (Wisconsin) populations in enclosures across three northern Wisconsin lakes — a natural range × lake factorial design.</a:t>
+            </a:r>
+          </a:p>
+          <a:p>
+            <a:pPr lvl="0" indent="0" marL="0">
+              <a:buNone/>
+            </a:pPr>
+            <a:r>
+              <a:rPr b="1"/>
+              <a:t>▶ Run this:</a:t>
+            </a:r>
+          </a:p>
+          <a:p>
+            <a:pPr lvl="0" indent="0">
+              <a:buNone/>
+            </a:pPr>
+            <a:r>
+              <a:rPr>
+                <a:solidFill>
+                  <a:srgbClr val="003B4F"/>
+                </a:solidFill>
+                <a:latin typeface="Courier"/>
+              </a:rPr>
+              <a:t>cray_df &lt;- </a:t>
+            </a:r>
+            <a:r>
+              <a:rPr>
+                <a:solidFill>
+                  <a:srgbClr val="4758AB"/>
+                </a:solidFill>
+                <a:latin typeface="Courier"/>
+              </a:rPr>
+              <a:t>read_csv</a:t>
+            </a:r>
+            <a:r>
+              <a:rPr>
+                <a:solidFill>
+                  <a:srgbClr val="003B4F"/>
+                </a:solidFill>
+                <a:latin typeface="Courier"/>
+              </a:rPr>
+              <a:t>(</a:t>
+            </a:r>
+            <a:r>
+              <a:rPr>
+                <a:solidFill>
+                  <a:srgbClr val="20794D"/>
+                </a:solidFill>
+                <a:latin typeface="Courier"/>
+              </a:rPr>
+              <a:t>"data/sargent_lodge_crayfish.csv"</a:t>
+            </a:r>
+            <a:r>
+              <a:rPr>
+                <a:solidFill>
+                  <a:srgbClr val="003B4F"/>
+                </a:solidFill>
+                <a:latin typeface="Courier"/>
+              </a:rPr>
+              <a:t>)</a:t>
+            </a:r>
+            <a:br/>
+            <a:r>
+              <a:rPr>
+                <a:solidFill>
+                  <a:srgbClr val="4758AB"/>
+                </a:solidFill>
+                <a:latin typeface="Courier"/>
+              </a:rPr>
+              <a:t>head</a:t>
+            </a:r>
+            <a:r>
+              <a:rPr>
+                <a:solidFill>
+                  <a:srgbClr val="003B4F"/>
+                </a:solidFill>
+                <a:latin typeface="Courier"/>
+              </a:rPr>
+              <a:t>(cray_df)</a:t>
+            </a:r>
+            <a:br/>
+            <a:br/>
+            <a:r>
+              <a:rPr>
+                <a:solidFill>
+                  <a:srgbClr val="003B4F"/>
+                </a:solidFill>
+                <a:latin typeface="Courier"/>
+              </a:rPr>
+              <a:t>cray_df </a:t>
+            </a:r>
+            <a:r>
+              <a:rPr>
+                <a:solidFill>
+                  <a:srgbClr val="5E5E5E"/>
+                </a:solidFill>
+                <a:latin typeface="Courier"/>
+              </a:rPr>
+              <a:t>%&gt;%</a:t>
+            </a:r>
+            <a:r>
+              <a:rPr>
+                <a:solidFill>
+                  <a:srgbClr val="003B4F"/>
+                </a:solidFill>
+                <a:latin typeface="Courier"/>
+              </a:rPr>
+              <a:t> </a:t>
+            </a:r>
+            <a:r>
+              <a:rPr>
+                <a:solidFill>
+                  <a:srgbClr val="4758AB"/>
+                </a:solidFill>
+                <a:latin typeface="Courier"/>
+              </a:rPr>
+              <a:t>count</a:t>
+            </a:r>
+            <a:r>
+              <a:rPr>
+                <a:solidFill>
+                  <a:srgbClr val="003B4F"/>
+                </a:solidFill>
+                <a:latin typeface="Courier"/>
+              </a:rPr>
+              <a:t>(range, lake)</a:t>
+            </a:r>
+          </a:p>
+          <a:p>
+            <a:pPr lvl="0" indent="0" marL="0">
+              <a:spcBef>
+                <a:spcPts val="3000"/>
+              </a:spcBef>
+              <a:buNone/>
+            </a:pPr>
+            <a:r>
+              <a:rPr b="1"/>
+              <a:t>Your Task</a:t>
+            </a:r>
+          </a:p>
+          <a:p>
+            <a:pPr lvl="0" indent="0" marL="0">
+              <a:buNone/>
+            </a:pPr>
+            <a:r>
+              <a:rPr b="1"/>
+              <a:t>Question:</a:t>
+            </a:r>
+            <a:r>
+              <a:rPr/>
+              <a:t> Does the effect of population range (Native vs. Invasive) on crayfish growth rate depend on which lake they’re in?</a:t>
+            </a:r>
+          </a:p>
+          <a:p>
+            <a:pPr lvl="0" indent="0" marL="0">
+              <a:buNone/>
+            </a:pPr>
+            <a:r>
+              <a:rPr/>
+              <a:t>✏️ </a:t>
+            </a:r>
+            <a:r>
+              <a:rPr b="1"/>
+              <a:t>Your turn:</a:t>
+            </a:r>
+            <a:r>
+              <a:rPr/>
+              <a:t> State your hypotheses for both main effects and the interaction. Look at how balanced (or not) the design is across </a:t>
+            </a:r>
+            <a:r>
+              <a:rPr>
+                <a:latin typeface="Courier"/>
+              </a:rPr>
+              <a:t>range</a:t>
+            </a:r>
+            <a:r>
+              <a:rPr/>
+              <a:t> and </a:t>
+            </a:r>
+            <a:r>
+              <a:rPr>
+                <a:latin typeface="Courier"/>
+              </a:rPr>
+              <a:t>lake</a:t>
+            </a:r>
+            <a:r>
+              <a:rPr/>
+              <a:t> — you already ran </a:t>
+            </a:r>
+            <a:r>
+              <a:rPr>
+                <a:latin typeface="Courier"/>
+              </a:rPr>
+              <a:t>count(range, lake)</a:t>
+            </a:r>
+            <a:r>
+              <a:rPr/>
+              <a:t> above — and decide which sums-of-squares type is appropriate here, and why. Justify your choice, fit the model, interpret it, and report the result properly.</a:t>
+            </a:r>
+          </a:p>
+          <a:p>
+            <a:pPr lvl="0" indent="0">
+              <a:buNone/>
+            </a:pPr>
+            <a:r>
+              <a:rPr>
+                <a:latin typeface="Courier"/>
+              </a:rPr>
+              <a:t>H0 (range) =
+________________________________________________________
+H0 (lake) =
+________________________________________________________
+H0 (interaction) =
+________________________________________________________
+SS type I will use and why:
+________________________________________________________</a:t>
+            </a:r>
+          </a:p>
+          <a:p>
+            <a:pPr lvl="0" indent="0">
+              <a:buNone/>
+            </a:pPr>
+            <a:r>
+              <a:rPr>
+                <a:solidFill>
+                  <a:srgbClr val="5E5E5E"/>
+                </a:solidFill>
+                <a:latin typeface="Courier"/>
+              </a:rPr>
+              <a:t># Write your code here:</a:t>
+            </a:r>
+          </a:p>
+          <a:p>
+            <a:pPr lvl="0" indent="0">
+              <a:buNone/>
+            </a:pPr>
+            <a:r>
+              <a:rPr>
+                <a:latin typeface="Courier"/>
+              </a:rPr>
+              <a:t>Interpretation:
+________________________________________________________
+________________________________________________________</a:t>
+            </a:r>
+          </a:p>
+          <a:p>
+            <a:pPr lvl="0" indent="0" marL="0">
+              <a:spcBef>
+                <a:spcPts val="3000"/>
+              </a:spcBef>
+              <a:buNone/>
+            </a:pPr>
+            <a:r>
+              <a:rPr b="1"/>
+              <a:t>Final Figure</a:t>
+            </a:r>
+          </a:p>
+          <a:p>
+            <a:pPr lvl="0" indent="0" marL="0">
+              <a:buNone/>
+            </a:pPr>
+            <a:r>
+              <a:rPr/>
+              <a:t>Produce one publication-quality interaction plot (growth rate by lake, colored by range) — proper axis labels, no default </a:t>
+            </a:r>
+            <a:r>
+              <a:rPr>
+                <a:latin typeface="Courier"/>
+              </a:rPr>
+              <a:t>ggplot</a:t>
+            </a:r>
+            <a:r>
+              <a:rPr/>
+              <a:t> grey background — and export it with </a:t>
+            </a:r>
+            <a:r>
+              <a:rPr>
+                <a:latin typeface="Courier"/>
+              </a:rPr>
+              <a:t>ggsave()</a:t>
+            </a:r>
+            <a:r>
+              <a:rPr/>
+              <a:t>.</a:t>
+            </a:r>
+          </a:p>
+          <a:p>
+            <a:pPr lvl="0" indent="0">
+              <a:buNone/>
+            </a:pPr>
+            <a:r>
+              <a:rPr>
+                <a:solidFill>
+                  <a:srgbClr val="5E5E5E"/>
+                </a:solidFill>
+                <a:latin typeface="Courier"/>
+              </a:rPr>
+              <a:t># Write your code here:</a:t>
+            </a:r>
+          </a:p>
+          <a:p>
+            <a:pPr lvl="0" indent="0" marL="1270000">
+              <a:buNone/>
+            </a:pPr>
+            <a:r>
+              <a:rPr sz="2000" b="1"/>
+              <a:t>Note</a:t>
+            </a:r>
+          </a:p>
+          <a:p>
+            <a:pPr lvl="0" indent="0" marL="1270000">
+              <a:buNone/>
+            </a:pPr>
+            <a:r>
+              <a:rPr sz="2000" b="1"/>
+              <a:t>📤 What to turn in — due Nov 2</a:t>
+            </a:r>
+          </a:p>
+          <a:p>
+            <a:pPr lvl="0" indent="0" marL="1270000">
+              <a:buNone/>
+            </a:pPr>
+            <a:r>
+              <a:rPr sz="2000"/>
+              <a:t>Your write-up should include:</a:t>
+            </a:r>
+          </a:p>
+          <a:p>
+            <a:pPr lvl="0"/>
+            <a:r>
+              <a:rPr sz="2000"/>
+              <a:t>☐ The question</a:t>
+            </a:r>
+          </a:p>
+          <a:p>
+            <a:pPr lvl="0"/>
+            <a:r>
+              <a:rPr sz="2000"/>
+              <a:t>☐ Your hypotheses</a:t>
+            </a:r>
+          </a:p>
+          <a:p>
+            <a:pPr lvl="0"/>
+            <a:r>
+              <a:rPr sz="2000"/>
+              <a:t>☐ Which SS type you used, and your justification for choosing it</a:t>
+            </a:r>
+          </a:p>
+          <a:p>
+            <a:pPr lvl="0"/>
+            <a:r>
+              <a:rPr sz="2000"/>
+              <a:t>☐ The code and its output</a:t>
+            </a:r>
+          </a:p>
+          <a:p>
+            <a:pPr lvl="0"/>
+            <a:r>
+              <a:rPr sz="2000"/>
+              <a:t>☐ Your interpretation of the result</a:t>
+            </a:r>
+          </a:p>
+          <a:p>
+            <a:pPr lvl="0"/>
+            <a:r>
+              <a:rPr sz="2000"/>
+              <a:t>☐ A final figure showing the result</a:t>
+            </a:r>
+          </a:p>
+          <a:p>
+            <a:pPr lvl="0" indent="0" marL="1270000">
+              <a:buNone/>
+            </a:pPr>
+            <a:r>
+              <a:rPr sz="2000" b="1"/>
+              <a:t>Note</a:t>
+            </a:r>
+          </a:p>
+          <a:p>
+            <a:pPr lvl="0" indent="0" marL="1270000">
+              <a:buNone/>
+            </a:pPr>
+            <a:r>
+              <a:rPr sz="2000" b="1"/>
+              <a:t>Reference</a:t>
+            </a:r>
+          </a:p>
+          <a:p>
+            <a:pPr lvl="0" indent="0" marL="1270000">
+              <a:buNone/>
+            </a:pPr>
+            <a:r>
+              <a:rPr sz="2000"/>
+              <a:t>Sargent, L.W. &amp; Lodge, D.M. (2014). Evolution of invasive traits in nonindigenous species: increased survival and faster growth in invasive populations of rusty crayfish (</a:t>
+            </a:r>
+            <a:r>
+              <a:rPr sz="2000" i="1"/>
+              <a:t>Orconectes rusticus</a:t>
+            </a:r>
+            <a:r>
+              <a:rPr sz="2000"/>
+              <a:t>). </a:t>
+            </a:r>
+            <a:r>
+              <a:rPr sz="2000" i="1"/>
+              <a:t>Evolutionary Applications</a:t>
+            </a:r>
+            <a:r>
+              <a:rPr sz="2000"/>
+              <a:t>, 7, 949–961.</a:t>
+            </a:r>
+          </a:p>
+        </p:txBody>
+      </p:sp>
+    </p:spTree>
+  </p:cSld>
+</p:sld>
+</file>
+
+<file path=ppt/slides/slide13.xml><?xml version="1.0" encoding="utf-8"?>
 <p:sld xmlns:a="http://schemas.openxmlformats.org/drawingml/2006/main" xmlns:r="http://schemas.openxmlformats.org/officeDocument/2006/relationships" xmlns:p="http://schemas.openxmlformats.org/presentationml/2006/main">
   <p:cSld>
     <p:spTree>
